--- a/Sunny-Pitch-Deck.pptx
+++ b/Sunny-Pitch-Deck.pptx
@@ -980,7 +980,7 @@
             <a:r>
               <a:rPr lang="en-US" dirty="0"/>
               <a:t>[0:40-1:05] The solution. Move fast here.
-"The child taps their weather. Five options, twenty seconds, once a day. No vocabulary needed — that matters enormously for neurodivergent kids."
+"The child taps a face. Five options, twenty seconds, once a day. No vocabulary needed — and no metaphor to decode first, which matters enormously for neurodivergent kids."
 "The teacher gets the class at a glance, plus soft signals. Never red alarms."
 Point at 'the child can see their own history' — it pre-empts the surveillance question.</a:t>
             </a:r>
@@ -1439,8 +1439,8 @@
             <a:r>
               <a:rPr lang="en-US" dirty="0"/>
               <a:t>[2:30-2:45] Inclusion. This is the slide that wins the EdTech track.
-"Ana is cloudy most days. She is never flagged — that's her normal, and normal is not a problem."
-"Ben is sunny most days. The same two rainy days get flagged, because for Ben they're a departure."
+"Ana checks in okay most days. She is never flagged — that's her normal, and normal is not a problem."
+"Ben checks in great most days. The same two not-good days get flagged, because for Ben they're a departure."
 "Change is the signal, not the level. That protects quiet and neurodivergent kids from being flagged for simply being themselves."
 If you only get one extra sentence in Q&amp;A, use this one.</a:t>
             </a:r>
@@ -2118,116 +2118,136 @@
           </a:p>
         </p:txBody>
       </p:sp>
-      <p:sp>
-        <p:nvSpPr>
-          <p:cNvPr id="8" name="Shape 6"/>
-          <p:cNvSpPr/>
-          <p:nvPr/>
-        </p:nvSpPr>
-        <p:spPr>
-          <a:xfrm>
-            <a:off x="868680" y="4892040"/>
-            <a:ext cx="402336" cy="402336"/>
-          </a:xfrm>
-          <a:prstGeom prst="ellipse">
-            <a:avLst/>
-          </a:prstGeom>
-          <a:solidFill>
-            <a:srgbClr val="FFCF4A"/>
-          </a:solidFill>
-          <a:ln/>
-        </p:spPr>
-      </p:sp>
-      <p:sp>
-        <p:nvSpPr>
-          <p:cNvPr id="9" name="Shape 7"/>
-          <p:cNvSpPr/>
-          <p:nvPr/>
-        </p:nvSpPr>
-        <p:spPr>
-          <a:xfrm>
-            <a:off x="1435608" y="4892040"/>
-            <a:ext cx="402336" cy="402336"/>
-          </a:xfrm>
-          <a:prstGeom prst="ellipse">
-            <a:avLst/>
-          </a:prstGeom>
-          <a:solidFill>
-            <a:srgbClr val="FFD98A"/>
-          </a:solidFill>
-          <a:ln/>
-        </p:spPr>
-      </p:sp>
-      <p:sp>
-        <p:nvSpPr>
-          <p:cNvPr id="10" name="Shape 8"/>
-          <p:cNvSpPr/>
-          <p:nvPr/>
-        </p:nvSpPr>
-        <p:spPr>
-          <a:xfrm>
-            <a:off x="2002536" y="4892040"/>
-            <a:ext cx="402336" cy="402336"/>
-          </a:xfrm>
-          <a:prstGeom prst="ellipse">
-            <a:avLst/>
-          </a:prstGeom>
-          <a:solidFill>
-            <a:srgbClr val="B9C4D4"/>
-          </a:solidFill>
-          <a:ln/>
-        </p:spPr>
-      </p:sp>
-      <p:sp>
-        <p:nvSpPr>
-          <p:cNvPr id="11" name="Shape 9"/>
-          <p:cNvSpPr/>
-          <p:nvPr/>
-        </p:nvSpPr>
-        <p:spPr>
-          <a:xfrm>
-            <a:off x="2569464" y="4892040"/>
-            <a:ext cx="402336" cy="402336"/>
-          </a:xfrm>
-          <a:prstGeom prst="ellipse">
-            <a:avLst/>
-          </a:prstGeom>
-          <a:solidFill>
-            <a:srgbClr val="7FA8D9"/>
-          </a:solidFill>
-          <a:ln/>
-        </p:spPr>
-      </p:sp>
-      <p:sp>
-        <p:nvSpPr>
-          <p:cNvPr id="12" name="Shape 10"/>
-          <p:cNvSpPr/>
-          <p:nvPr/>
-        </p:nvSpPr>
-        <p:spPr>
-          <a:xfrm>
-            <a:off x="3136392" y="4892040"/>
-            <a:ext cx="402336" cy="402336"/>
-          </a:xfrm>
-          <a:prstGeom prst="ellipse">
-            <a:avLst/>
-          </a:prstGeom>
-          <a:solidFill>
-            <a:srgbClr val="8B7FD9"/>
-          </a:solidFill>
-          <a:ln/>
-        </p:spPr>
-      </p:sp>
-      <p:sp>
-        <p:nvSpPr>
-          <p:cNvPr id="13" name="Text 11"/>
-          <p:cNvSpPr/>
-          <p:nvPr/>
-        </p:nvSpPr>
-        <p:spPr>
-          <a:xfrm>
-            <a:off x="3886200" y="4892040"/>
-            <a:ext cx="4572000" cy="402336"/>
+      <p:pic>
+        <p:nvPicPr>
+          <p:cNvPr id="8" name="Image 0" descr="preencoded.png">    </p:cNvPr>
+          <p:cNvPicPr>
+            <a:picLocks noChangeAspect="1"/>
+          </p:cNvPicPr>
+          <p:nvPr/>
+        </p:nvPicPr>
+        <p:blipFill>
+          <a:blip r:embed="rId1"/>
+          <a:stretch>
+            <a:fillRect/>
+          </a:stretch>
+        </p:blipFill>
+        <p:spPr>
+          <a:xfrm>
+            <a:off x="868680" y="4846320"/>
+            <a:ext cx="457200" cy="457200"/>
+          </a:xfrm>
+          <a:prstGeom prst="rect">
+            <a:avLst/>
+          </a:prstGeom>
+        </p:spPr>
+      </p:pic>
+      <p:pic>
+        <p:nvPicPr>
+          <p:cNvPr id="9" name="Image 1" descr="preencoded.png">    </p:cNvPr>
+          <p:cNvPicPr>
+            <a:picLocks noChangeAspect="1"/>
+          </p:cNvPicPr>
+          <p:nvPr/>
+        </p:nvPicPr>
+        <p:blipFill>
+          <a:blip r:embed="rId2"/>
+          <a:stretch>
+            <a:fillRect/>
+          </a:stretch>
+        </p:blipFill>
+        <p:spPr>
+          <a:xfrm>
+            <a:off x="1435608" y="4846320"/>
+            <a:ext cx="457200" cy="457200"/>
+          </a:xfrm>
+          <a:prstGeom prst="rect">
+            <a:avLst/>
+          </a:prstGeom>
+        </p:spPr>
+      </p:pic>
+      <p:pic>
+        <p:nvPicPr>
+          <p:cNvPr id="10" name="Image 2" descr="preencoded.png">    </p:cNvPr>
+          <p:cNvPicPr>
+            <a:picLocks noChangeAspect="1"/>
+          </p:cNvPicPr>
+          <p:nvPr/>
+        </p:nvPicPr>
+        <p:blipFill>
+          <a:blip r:embed="rId3"/>
+          <a:stretch>
+            <a:fillRect/>
+          </a:stretch>
+        </p:blipFill>
+        <p:spPr>
+          <a:xfrm>
+            <a:off x="2002536" y="4846320"/>
+            <a:ext cx="457200" cy="457200"/>
+          </a:xfrm>
+          <a:prstGeom prst="rect">
+            <a:avLst/>
+          </a:prstGeom>
+        </p:spPr>
+      </p:pic>
+      <p:pic>
+        <p:nvPicPr>
+          <p:cNvPr id="11" name="Image 3" descr="preencoded.png">    </p:cNvPr>
+          <p:cNvPicPr>
+            <a:picLocks noChangeAspect="1"/>
+          </p:cNvPicPr>
+          <p:nvPr/>
+        </p:nvPicPr>
+        <p:blipFill>
+          <a:blip r:embed="rId4"/>
+          <a:stretch>
+            <a:fillRect/>
+          </a:stretch>
+        </p:blipFill>
+        <p:spPr>
+          <a:xfrm>
+            <a:off x="2569464" y="4846320"/>
+            <a:ext cx="457200" cy="457200"/>
+          </a:xfrm>
+          <a:prstGeom prst="rect">
+            <a:avLst/>
+          </a:prstGeom>
+        </p:spPr>
+      </p:pic>
+      <p:pic>
+        <p:nvPicPr>
+          <p:cNvPr id="12" name="Image 4" descr="preencoded.png">    </p:cNvPr>
+          <p:cNvPicPr>
+            <a:picLocks noChangeAspect="1"/>
+          </p:cNvPicPr>
+          <p:nvPr/>
+        </p:nvPicPr>
+        <p:blipFill>
+          <a:blip r:embed="rId5"/>
+          <a:stretch>
+            <a:fillRect/>
+          </a:stretch>
+        </p:blipFill>
+        <p:spPr>
+          <a:xfrm>
+            <a:off x="3136392" y="4846320"/>
+            <a:ext cx="457200" cy="457200"/>
+          </a:xfrm>
+          <a:prstGeom prst="rect">
+            <a:avLst/>
+          </a:prstGeom>
+        </p:spPr>
+      </p:pic>
+      <p:sp>
+        <p:nvSpPr>
+          <p:cNvPr id="13" name="Text 6"/>
+          <p:cNvSpPr/>
+          <p:nvPr/>
+        </p:nvSpPr>
+        <p:spPr>
+          <a:xfrm>
+            <a:off x="3977640" y="4846320"/>
+            <a:ext cx="4572000" cy="457200"/>
           </a:xfrm>
           <a:prstGeom prst="rect">
             <a:avLst/>
@@ -2259,7 +2279,7 @@
       </p:sp>
       <p:sp>
         <p:nvSpPr>
-          <p:cNvPr id="14" name="Text 12"/>
+          <p:cNvPr id="14" name="Text 7"/>
           <p:cNvSpPr/>
           <p:nvPr/>
         </p:nvSpPr>
@@ -4167,109 +4187,129 @@
           </a:p>
         </p:txBody>
       </p:sp>
-      <p:sp>
-        <p:nvSpPr>
-          <p:cNvPr id="7" name="Shape 5"/>
-          <p:cNvSpPr/>
-          <p:nvPr/>
-        </p:nvSpPr>
-        <p:spPr>
-          <a:xfrm>
-            <a:off x="868680" y="5440680"/>
-            <a:ext cx="402336" cy="402336"/>
-          </a:xfrm>
-          <a:prstGeom prst="ellipse">
-            <a:avLst/>
-          </a:prstGeom>
-          <a:solidFill>
-            <a:srgbClr val="FFCF4A"/>
-          </a:solidFill>
-          <a:ln/>
-        </p:spPr>
-      </p:sp>
-      <p:sp>
-        <p:nvSpPr>
-          <p:cNvPr id="8" name="Shape 6"/>
-          <p:cNvSpPr/>
-          <p:nvPr/>
-        </p:nvSpPr>
-        <p:spPr>
-          <a:xfrm>
-            <a:off x="1435608" y="5440680"/>
-            <a:ext cx="402336" cy="402336"/>
-          </a:xfrm>
-          <a:prstGeom prst="ellipse">
-            <a:avLst/>
-          </a:prstGeom>
-          <a:solidFill>
-            <a:srgbClr val="FFD98A"/>
-          </a:solidFill>
-          <a:ln/>
-        </p:spPr>
-      </p:sp>
-      <p:sp>
-        <p:nvSpPr>
-          <p:cNvPr id="9" name="Shape 7"/>
-          <p:cNvSpPr/>
-          <p:nvPr/>
-        </p:nvSpPr>
-        <p:spPr>
-          <a:xfrm>
-            <a:off x="2002536" y="5440680"/>
-            <a:ext cx="402336" cy="402336"/>
-          </a:xfrm>
-          <a:prstGeom prst="ellipse">
-            <a:avLst/>
-          </a:prstGeom>
-          <a:solidFill>
-            <a:srgbClr val="B9C4D4"/>
-          </a:solidFill>
-          <a:ln/>
-        </p:spPr>
-      </p:sp>
-      <p:sp>
-        <p:nvSpPr>
-          <p:cNvPr id="10" name="Shape 8"/>
-          <p:cNvSpPr/>
-          <p:nvPr/>
-        </p:nvSpPr>
-        <p:spPr>
-          <a:xfrm>
-            <a:off x="2569464" y="5440680"/>
-            <a:ext cx="402336" cy="402336"/>
-          </a:xfrm>
-          <a:prstGeom prst="ellipse">
-            <a:avLst/>
-          </a:prstGeom>
-          <a:solidFill>
-            <a:srgbClr val="7FA8D9"/>
-          </a:solidFill>
-          <a:ln/>
-        </p:spPr>
-      </p:sp>
-      <p:sp>
-        <p:nvSpPr>
-          <p:cNvPr id="11" name="Shape 9"/>
-          <p:cNvSpPr/>
-          <p:nvPr/>
-        </p:nvSpPr>
-        <p:spPr>
-          <a:xfrm>
-            <a:off x="3136392" y="5440680"/>
-            <a:ext cx="402336" cy="402336"/>
-          </a:xfrm>
-          <a:prstGeom prst="ellipse">
-            <a:avLst/>
-          </a:prstGeom>
-          <a:solidFill>
-            <a:srgbClr val="8B7FD9"/>
-          </a:solidFill>
-          <a:ln/>
-        </p:spPr>
-      </p:sp>
-      <p:sp>
-        <p:nvSpPr>
-          <p:cNvPr id="12" name="Text 10"/>
+      <p:pic>
+        <p:nvPicPr>
+          <p:cNvPr id="7" name="Image 0" descr="preencoded.png">    </p:cNvPr>
+          <p:cNvPicPr>
+            <a:picLocks noChangeAspect="1"/>
+          </p:cNvPicPr>
+          <p:nvPr/>
+        </p:nvPicPr>
+        <p:blipFill>
+          <a:blip r:embed="rId1"/>
+          <a:stretch>
+            <a:fillRect/>
+          </a:stretch>
+        </p:blipFill>
+        <p:spPr>
+          <a:xfrm>
+            <a:off x="868680" y="5394960"/>
+            <a:ext cx="457200" cy="457200"/>
+          </a:xfrm>
+          <a:prstGeom prst="rect">
+            <a:avLst/>
+          </a:prstGeom>
+        </p:spPr>
+      </p:pic>
+      <p:pic>
+        <p:nvPicPr>
+          <p:cNvPr id="8" name="Image 1" descr="preencoded.png">    </p:cNvPr>
+          <p:cNvPicPr>
+            <a:picLocks noChangeAspect="1"/>
+          </p:cNvPicPr>
+          <p:nvPr/>
+        </p:nvPicPr>
+        <p:blipFill>
+          <a:blip r:embed="rId2"/>
+          <a:stretch>
+            <a:fillRect/>
+          </a:stretch>
+        </p:blipFill>
+        <p:spPr>
+          <a:xfrm>
+            <a:off x="1435608" y="5394960"/>
+            <a:ext cx="457200" cy="457200"/>
+          </a:xfrm>
+          <a:prstGeom prst="rect">
+            <a:avLst/>
+          </a:prstGeom>
+        </p:spPr>
+      </p:pic>
+      <p:pic>
+        <p:nvPicPr>
+          <p:cNvPr id="9" name="Image 2" descr="preencoded.png">    </p:cNvPr>
+          <p:cNvPicPr>
+            <a:picLocks noChangeAspect="1"/>
+          </p:cNvPicPr>
+          <p:nvPr/>
+        </p:nvPicPr>
+        <p:blipFill>
+          <a:blip r:embed="rId3"/>
+          <a:stretch>
+            <a:fillRect/>
+          </a:stretch>
+        </p:blipFill>
+        <p:spPr>
+          <a:xfrm>
+            <a:off x="2002536" y="5394960"/>
+            <a:ext cx="457200" cy="457200"/>
+          </a:xfrm>
+          <a:prstGeom prst="rect">
+            <a:avLst/>
+          </a:prstGeom>
+        </p:spPr>
+      </p:pic>
+      <p:pic>
+        <p:nvPicPr>
+          <p:cNvPr id="10" name="Image 3" descr="preencoded.png">    </p:cNvPr>
+          <p:cNvPicPr>
+            <a:picLocks noChangeAspect="1"/>
+          </p:cNvPicPr>
+          <p:nvPr/>
+        </p:nvPicPr>
+        <p:blipFill>
+          <a:blip r:embed="rId4"/>
+          <a:stretch>
+            <a:fillRect/>
+          </a:stretch>
+        </p:blipFill>
+        <p:spPr>
+          <a:xfrm>
+            <a:off x="2569464" y="5394960"/>
+            <a:ext cx="457200" cy="457200"/>
+          </a:xfrm>
+          <a:prstGeom prst="rect">
+            <a:avLst/>
+          </a:prstGeom>
+        </p:spPr>
+      </p:pic>
+      <p:pic>
+        <p:nvPicPr>
+          <p:cNvPr id="11" name="Image 4" descr="preencoded.png">    </p:cNvPr>
+          <p:cNvPicPr>
+            <a:picLocks noChangeAspect="1"/>
+          </p:cNvPicPr>
+          <p:nvPr/>
+        </p:nvPicPr>
+        <p:blipFill>
+          <a:blip r:embed="rId5"/>
+          <a:stretch>
+            <a:fillRect/>
+          </a:stretch>
+        </p:blipFill>
+        <p:spPr>
+          <a:xfrm>
+            <a:off x="3136392" y="5394960"/>
+            <a:ext cx="457200" cy="457200"/>
+          </a:xfrm>
+          <a:prstGeom prst="rect">
+            <a:avLst/>
+          </a:prstGeom>
+        </p:spPr>
+      </p:pic>
+      <p:sp>
+        <p:nvSpPr>
+          <p:cNvPr id="12" name="Text 5"/>
           <p:cNvSpPr/>
           <p:nvPr/>
         </p:nvSpPr>
@@ -5231,150 +5271,135 @@
                 <a:ea typeface="Calibri" pitchFamily="34" charset="-122"/>
                 <a:cs typeface="Calibri" pitchFamily="34" charset="-120"/>
               </a:rPr>
-              <a:t>“How's your weather today?”</a:t>
+              <a:t>“How are you feeling today?”</a:t>
             </a:r>
             <a:endParaRPr lang="en-US" sz="1400" dirty="0"/>
           </a:p>
         </p:txBody>
       </p:sp>
-      <p:sp>
-        <p:nvSpPr>
-          <p:cNvPr id="9" name="Shape 7"/>
-          <p:cNvSpPr/>
-          <p:nvPr/>
-        </p:nvSpPr>
+      <p:pic>
+        <p:nvPicPr>
+          <p:cNvPr id="9" name="Image 0" descr="preencoded.png">    </p:cNvPr>
+          <p:cNvPicPr>
+            <a:picLocks noChangeAspect="1"/>
+          </p:cNvPicPr>
+          <p:nvPr/>
+        </p:nvPicPr>
+        <p:blipFill>
+          <a:blip r:embed="rId1"/>
+          <a:stretch>
+            <a:fillRect/>
+          </a:stretch>
+        </p:blipFill>
         <p:spPr>
           <a:xfrm>
             <a:off x="1051560" y="3401568"/>
-            <a:ext cx="530352" cy="530352"/>
-          </a:xfrm>
-          <a:prstGeom prst="ellipse">
-            <a:avLst/>
-          </a:prstGeom>
-          <a:solidFill>
-            <a:srgbClr val="FFCF4A"/>
-          </a:solidFill>
-          <a:ln/>
-          <a:effectLst>
-            <a:outerShdw sx="100000" sy="100000" kx="0" ky="0" algn="bl" rotWithShape="0" blurRad="177800" dist="38100" dir="5400000">
-              <a:srgbClr val="0B1220">
-                <a:alpha val="16000"/>
-              </a:srgbClr>
-            </a:outerShdw>
-          </a:effectLst>
-        </p:spPr>
-      </p:sp>
-      <p:sp>
-        <p:nvSpPr>
-          <p:cNvPr id="10" name="Shape 8"/>
-          <p:cNvSpPr/>
-          <p:nvPr/>
-        </p:nvSpPr>
+            <a:ext cx="566928" cy="566928"/>
+          </a:xfrm>
+          <a:prstGeom prst="rect">
+            <a:avLst/>
+          </a:prstGeom>
+        </p:spPr>
+      </p:pic>
+      <p:pic>
+        <p:nvPicPr>
+          <p:cNvPr id="10" name="Image 1" descr="preencoded.png">    </p:cNvPr>
+          <p:cNvPicPr>
+            <a:picLocks noChangeAspect="1"/>
+          </p:cNvPicPr>
+          <p:nvPr/>
+        </p:nvPicPr>
+        <p:blipFill>
+          <a:blip r:embed="rId2"/>
+          <a:stretch>
+            <a:fillRect/>
+          </a:stretch>
+        </p:blipFill>
         <p:spPr>
           <a:xfrm>
             <a:off x="1764792" y="3401568"/>
-            <a:ext cx="530352" cy="530352"/>
-          </a:xfrm>
-          <a:prstGeom prst="ellipse">
-            <a:avLst/>
-          </a:prstGeom>
-          <a:solidFill>
-            <a:srgbClr val="FFD98A"/>
-          </a:solidFill>
-          <a:ln/>
-          <a:effectLst>
-            <a:outerShdw sx="100000" sy="100000" kx="0" ky="0" algn="bl" rotWithShape="0" blurRad="177800" dist="38100" dir="5400000">
-              <a:srgbClr val="0B1220">
-                <a:alpha val="16000"/>
-              </a:srgbClr>
-            </a:outerShdw>
-          </a:effectLst>
-        </p:spPr>
-      </p:sp>
-      <p:sp>
-        <p:nvSpPr>
-          <p:cNvPr id="11" name="Shape 9"/>
-          <p:cNvSpPr/>
-          <p:nvPr/>
-        </p:nvSpPr>
+            <a:ext cx="566928" cy="566928"/>
+          </a:xfrm>
+          <a:prstGeom prst="rect">
+            <a:avLst/>
+          </a:prstGeom>
+        </p:spPr>
+      </p:pic>
+      <p:pic>
+        <p:nvPicPr>
+          <p:cNvPr id="11" name="Image 2" descr="preencoded.png">    </p:cNvPr>
+          <p:cNvPicPr>
+            <a:picLocks noChangeAspect="1"/>
+          </p:cNvPicPr>
+          <p:nvPr/>
+        </p:nvPicPr>
+        <p:blipFill>
+          <a:blip r:embed="rId3"/>
+          <a:stretch>
+            <a:fillRect/>
+          </a:stretch>
+        </p:blipFill>
         <p:spPr>
           <a:xfrm>
             <a:off x="2478024" y="3401568"/>
-            <a:ext cx="530352" cy="530352"/>
-          </a:xfrm>
-          <a:prstGeom prst="ellipse">
-            <a:avLst/>
-          </a:prstGeom>
-          <a:solidFill>
-            <a:srgbClr val="B9C4D4"/>
-          </a:solidFill>
-          <a:ln/>
-          <a:effectLst>
-            <a:outerShdw sx="100000" sy="100000" kx="0" ky="0" algn="bl" rotWithShape="0" blurRad="177800" dist="38100" dir="5400000">
-              <a:srgbClr val="0B1220">
-                <a:alpha val="16000"/>
-              </a:srgbClr>
-            </a:outerShdw>
-          </a:effectLst>
-        </p:spPr>
-      </p:sp>
-      <p:sp>
-        <p:nvSpPr>
-          <p:cNvPr id="12" name="Shape 10"/>
-          <p:cNvSpPr/>
-          <p:nvPr/>
-        </p:nvSpPr>
+            <a:ext cx="566928" cy="566928"/>
+          </a:xfrm>
+          <a:prstGeom prst="rect">
+            <a:avLst/>
+          </a:prstGeom>
+        </p:spPr>
+      </p:pic>
+      <p:pic>
+        <p:nvPicPr>
+          <p:cNvPr id="12" name="Image 3" descr="preencoded.png">    </p:cNvPr>
+          <p:cNvPicPr>
+            <a:picLocks noChangeAspect="1"/>
+          </p:cNvPicPr>
+          <p:nvPr/>
+        </p:nvPicPr>
+        <p:blipFill>
+          <a:blip r:embed="rId4"/>
+          <a:stretch>
+            <a:fillRect/>
+          </a:stretch>
+        </p:blipFill>
         <p:spPr>
           <a:xfrm>
             <a:off x="3191256" y="3401568"/>
-            <a:ext cx="530352" cy="530352"/>
-          </a:xfrm>
-          <a:prstGeom prst="ellipse">
-            <a:avLst/>
-          </a:prstGeom>
-          <a:solidFill>
-            <a:srgbClr val="7FA8D9"/>
-          </a:solidFill>
-          <a:ln/>
-          <a:effectLst>
-            <a:outerShdw sx="100000" sy="100000" kx="0" ky="0" algn="bl" rotWithShape="0" blurRad="177800" dist="38100" dir="5400000">
-              <a:srgbClr val="0B1220">
-                <a:alpha val="16000"/>
-              </a:srgbClr>
-            </a:outerShdw>
-          </a:effectLst>
-        </p:spPr>
-      </p:sp>
-      <p:sp>
-        <p:nvSpPr>
-          <p:cNvPr id="13" name="Shape 11"/>
-          <p:cNvSpPr/>
-          <p:nvPr/>
-        </p:nvSpPr>
+            <a:ext cx="566928" cy="566928"/>
+          </a:xfrm>
+          <a:prstGeom prst="rect">
+            <a:avLst/>
+          </a:prstGeom>
+        </p:spPr>
+      </p:pic>
+      <p:pic>
+        <p:nvPicPr>
+          <p:cNvPr id="13" name="Image 4" descr="preencoded.png">    </p:cNvPr>
+          <p:cNvPicPr>
+            <a:picLocks noChangeAspect="1"/>
+          </p:cNvPicPr>
+          <p:nvPr/>
+        </p:nvPicPr>
+        <p:blipFill>
+          <a:blip r:embed="rId5"/>
+          <a:stretch>
+            <a:fillRect/>
+          </a:stretch>
+        </p:blipFill>
         <p:spPr>
           <a:xfrm>
             <a:off x="3904488" y="3401568"/>
-            <a:ext cx="530352" cy="530352"/>
-          </a:xfrm>
-          <a:prstGeom prst="ellipse">
-            <a:avLst/>
-          </a:prstGeom>
-          <a:solidFill>
-            <a:srgbClr val="8B7FD9"/>
-          </a:solidFill>
-          <a:ln/>
-          <a:effectLst>
-            <a:outerShdw sx="100000" sy="100000" kx="0" ky="0" algn="bl" rotWithShape="0" blurRad="177800" dist="38100" dir="5400000">
-              <a:srgbClr val="0B1220">
-                <a:alpha val="16000"/>
-              </a:srgbClr>
-            </a:outerShdw>
-          </a:effectLst>
-        </p:spPr>
-      </p:sp>
-      <p:sp>
-        <p:nvSpPr>
-          <p:cNvPr id="14" name="Text 12"/>
+            <a:ext cx="566928" cy="566928"/>
+          </a:xfrm>
+          <a:prstGeom prst="rect">
+            <a:avLst/>
+          </a:prstGeom>
+        </p:spPr>
+      </p:pic>
+      <p:sp>
+        <p:nvSpPr>
+          <p:cNvPr id="14" name="Text 7"/>
           <p:cNvSpPr/>
           <p:nvPr/>
         </p:nvSpPr>
@@ -5409,7 +5434,7 @@
                 <a:ea typeface="Calibri" pitchFamily="34" charset="-122"/>
                 <a:cs typeface="Calibri" pitchFamily="34" charset="-120"/>
               </a:rPr>
-              <a:t>Weather, not words — no vocabulary needed</a:t>
+              <a:t>Faces, not words — no vocabulary needed</a:t>
             </a:r>
             <a:endParaRPr lang="en-US" sz="1250" dirty="0"/>
           </a:p>
@@ -5459,7 +5484,7 @@
       </p:sp>
       <p:sp>
         <p:nvSpPr>
-          <p:cNvPr id="15" name="Shape 13"/>
+          <p:cNvPr id="15" name="Shape 8"/>
           <p:cNvSpPr/>
           <p:nvPr/>
         </p:nvSpPr>
@@ -5493,7 +5518,7 @@
       </p:sp>
       <p:sp>
         <p:nvSpPr>
-          <p:cNvPr id="16" name="Shape 14"/>
+          <p:cNvPr id="16" name="Shape 9"/>
           <p:cNvSpPr/>
           <p:nvPr/>
         </p:nvSpPr>
@@ -5520,7 +5545,7 @@
       </p:sp>
       <p:sp>
         <p:nvSpPr>
-          <p:cNvPr id="17" name="Text 15"/>
+          <p:cNvPr id="17" name="Text 10"/>
           <p:cNvSpPr/>
           <p:nvPr/>
         </p:nvSpPr>
@@ -5559,7 +5584,7 @@
       </p:sp>
       <p:sp>
         <p:nvSpPr>
-          <p:cNvPr id="18" name="Text 16"/>
+          <p:cNvPr id="18" name="Text 11"/>
           <p:cNvSpPr/>
           <p:nvPr/>
         </p:nvSpPr>
@@ -5598,7 +5623,7 @@
       </p:sp>
       <p:sp>
         <p:nvSpPr>
-          <p:cNvPr id="19" name="Text 17"/>
+          <p:cNvPr id="19" name="Text 12"/>
           <p:cNvSpPr/>
           <p:nvPr/>
         </p:nvSpPr>
@@ -5635,249 +5660,297 @@
           </a:p>
         </p:txBody>
       </p:sp>
-      <p:sp>
-        <p:nvSpPr>
-          <p:cNvPr id="20" name="Shape 18"/>
-          <p:cNvSpPr/>
-          <p:nvPr/>
-        </p:nvSpPr>
+      <p:pic>
+        <p:nvPicPr>
+          <p:cNvPr id="20" name="Image 5" descr="preencoded.png">    </p:cNvPr>
+          <p:cNvPicPr>
+            <a:picLocks noChangeAspect="1"/>
+          </p:cNvPicPr>
+          <p:nvPr/>
+        </p:nvPicPr>
+        <p:blipFill>
+          <a:blip r:embed="rId6"/>
+          <a:stretch>
+            <a:fillRect/>
+          </a:stretch>
+        </p:blipFill>
         <p:spPr>
           <a:xfrm>
             <a:off x="6583680" y="3401568"/>
-            <a:ext cx="292608" cy="292608"/>
-          </a:xfrm>
-          <a:prstGeom prst="ellipse">
-            <a:avLst/>
-          </a:prstGeom>
-          <a:solidFill>
-            <a:srgbClr val="FFCF4A"/>
-          </a:solidFill>
-          <a:ln/>
-        </p:spPr>
-      </p:sp>
-      <p:sp>
-        <p:nvSpPr>
-          <p:cNvPr id="21" name="Shape 19"/>
-          <p:cNvSpPr/>
-          <p:nvPr/>
-        </p:nvSpPr>
+            <a:ext cx="310896" cy="310896"/>
+          </a:xfrm>
+          <a:prstGeom prst="rect">
+            <a:avLst/>
+          </a:prstGeom>
+        </p:spPr>
+      </p:pic>
+      <p:pic>
+        <p:nvPicPr>
+          <p:cNvPr id="21" name="Image 6" descr="preencoded.png">    </p:cNvPr>
+          <p:cNvPicPr>
+            <a:picLocks noChangeAspect="1"/>
+          </p:cNvPicPr>
+          <p:nvPr/>
+        </p:nvPicPr>
+        <p:blipFill>
+          <a:blip r:embed="rId7"/>
+          <a:stretch>
+            <a:fillRect/>
+          </a:stretch>
+        </p:blipFill>
         <p:spPr>
           <a:xfrm>
             <a:off x="6967728" y="3401568"/>
-            <a:ext cx="292608" cy="292608"/>
-          </a:xfrm>
-          <a:prstGeom prst="ellipse">
-            <a:avLst/>
-          </a:prstGeom>
-          <a:solidFill>
-            <a:srgbClr val="FFCF4A"/>
-          </a:solidFill>
-          <a:ln/>
-        </p:spPr>
-      </p:sp>
-      <p:sp>
-        <p:nvSpPr>
-          <p:cNvPr id="22" name="Shape 20"/>
-          <p:cNvSpPr/>
-          <p:nvPr/>
-        </p:nvSpPr>
+            <a:ext cx="310896" cy="310896"/>
+          </a:xfrm>
+          <a:prstGeom prst="rect">
+            <a:avLst/>
+          </a:prstGeom>
+        </p:spPr>
+      </p:pic>
+      <p:pic>
+        <p:nvPicPr>
+          <p:cNvPr id="22" name="Image 7" descr="preencoded.png">    </p:cNvPr>
+          <p:cNvPicPr>
+            <a:picLocks noChangeAspect="1"/>
+          </p:cNvPicPr>
+          <p:nvPr/>
+        </p:nvPicPr>
+        <p:blipFill>
+          <a:blip r:embed="rId8"/>
+          <a:stretch>
+            <a:fillRect/>
+          </a:stretch>
+        </p:blipFill>
         <p:spPr>
           <a:xfrm>
             <a:off x="7351776" y="3401568"/>
-            <a:ext cx="292608" cy="292608"/>
-          </a:xfrm>
-          <a:prstGeom prst="ellipse">
-            <a:avLst/>
-          </a:prstGeom>
-          <a:solidFill>
-            <a:srgbClr val="7FA8D9"/>
-          </a:solidFill>
-          <a:ln/>
-        </p:spPr>
-      </p:sp>
-      <p:sp>
-        <p:nvSpPr>
-          <p:cNvPr id="23" name="Shape 21"/>
-          <p:cNvSpPr/>
-          <p:nvPr/>
-        </p:nvSpPr>
+            <a:ext cx="310896" cy="310896"/>
+          </a:xfrm>
+          <a:prstGeom prst="rect">
+            <a:avLst/>
+          </a:prstGeom>
+        </p:spPr>
+      </p:pic>
+      <p:pic>
+        <p:nvPicPr>
+          <p:cNvPr id="23" name="Image 8" descr="preencoded.png">    </p:cNvPr>
+          <p:cNvPicPr>
+            <a:picLocks noChangeAspect="1"/>
+          </p:cNvPicPr>
+          <p:nvPr/>
+        </p:nvPicPr>
+        <p:blipFill>
+          <a:blip r:embed="rId9"/>
+          <a:stretch>
+            <a:fillRect/>
+          </a:stretch>
+        </p:blipFill>
         <p:spPr>
           <a:xfrm>
             <a:off x="7735824" y="3401568"/>
-            <a:ext cx="292608" cy="292608"/>
-          </a:xfrm>
-          <a:prstGeom prst="ellipse">
-            <a:avLst/>
-          </a:prstGeom>
-          <a:solidFill>
-            <a:srgbClr val="FFCF4A"/>
-          </a:solidFill>
-          <a:ln/>
-        </p:spPr>
-      </p:sp>
-      <p:sp>
-        <p:nvSpPr>
-          <p:cNvPr id="24" name="Shape 22"/>
-          <p:cNvSpPr/>
-          <p:nvPr/>
-        </p:nvSpPr>
+            <a:ext cx="310896" cy="310896"/>
+          </a:xfrm>
+          <a:prstGeom prst="rect">
+            <a:avLst/>
+          </a:prstGeom>
+        </p:spPr>
+      </p:pic>
+      <p:pic>
+        <p:nvPicPr>
+          <p:cNvPr id="24" name="Image 9" descr="preencoded.png">    </p:cNvPr>
+          <p:cNvPicPr>
+            <a:picLocks noChangeAspect="1"/>
+          </p:cNvPicPr>
+          <p:nvPr/>
+        </p:nvPicPr>
+        <p:blipFill>
+          <a:blip r:embed="rId10"/>
+          <a:stretch>
+            <a:fillRect/>
+          </a:stretch>
+        </p:blipFill>
         <p:spPr>
           <a:xfrm>
             <a:off x="8119872" y="3401568"/>
-            <a:ext cx="292608" cy="292608"/>
-          </a:xfrm>
-          <a:prstGeom prst="ellipse">
-            <a:avLst/>
-          </a:prstGeom>
-          <a:solidFill>
-            <a:srgbClr val="FFD98A"/>
-          </a:solidFill>
-          <a:ln/>
-        </p:spPr>
-      </p:sp>
-      <p:sp>
-        <p:nvSpPr>
-          <p:cNvPr id="25" name="Shape 23"/>
-          <p:cNvSpPr/>
-          <p:nvPr/>
-        </p:nvSpPr>
+            <a:ext cx="310896" cy="310896"/>
+          </a:xfrm>
+          <a:prstGeom prst="rect">
+            <a:avLst/>
+          </a:prstGeom>
+        </p:spPr>
+      </p:pic>
+      <p:pic>
+        <p:nvPicPr>
+          <p:cNvPr id="25" name="Image 10" descr="preencoded.png">    </p:cNvPr>
+          <p:cNvPicPr>
+            <a:picLocks noChangeAspect="1"/>
+          </p:cNvPicPr>
+          <p:nvPr/>
+        </p:nvPicPr>
+        <p:blipFill>
+          <a:blip r:embed="rId11"/>
+          <a:stretch>
+            <a:fillRect/>
+          </a:stretch>
+        </p:blipFill>
         <p:spPr>
           <a:xfrm>
             <a:off x="8503920" y="3401568"/>
-            <a:ext cx="292608" cy="292608"/>
-          </a:xfrm>
-          <a:prstGeom prst="ellipse">
-            <a:avLst/>
-          </a:prstGeom>
-          <a:solidFill>
-            <a:srgbClr val="FFCF4A"/>
-          </a:solidFill>
-          <a:ln/>
-        </p:spPr>
-      </p:sp>
-      <p:sp>
-        <p:nvSpPr>
-          <p:cNvPr id="26" name="Shape 24"/>
-          <p:cNvSpPr/>
-          <p:nvPr/>
-        </p:nvSpPr>
+            <a:ext cx="310896" cy="310896"/>
+          </a:xfrm>
+          <a:prstGeom prst="rect">
+            <a:avLst/>
+          </a:prstGeom>
+        </p:spPr>
+      </p:pic>
+      <p:pic>
+        <p:nvPicPr>
+          <p:cNvPr id="26" name="Image 11" descr="preencoded.png">    </p:cNvPr>
+          <p:cNvPicPr>
+            <a:picLocks noChangeAspect="1"/>
+          </p:cNvPicPr>
+          <p:nvPr/>
+        </p:nvPicPr>
+        <p:blipFill>
+          <a:blip r:embed="rId12"/>
+          <a:stretch>
+            <a:fillRect/>
+          </a:stretch>
+        </p:blipFill>
         <p:spPr>
           <a:xfrm>
             <a:off x="6583680" y="3785616"/>
-            <a:ext cx="292608" cy="292608"/>
-          </a:xfrm>
-          <a:prstGeom prst="ellipse">
-            <a:avLst/>
-          </a:prstGeom>
-          <a:solidFill>
-            <a:srgbClr val="FFCF4A"/>
-          </a:solidFill>
-          <a:ln/>
-        </p:spPr>
-      </p:sp>
-      <p:sp>
-        <p:nvSpPr>
-          <p:cNvPr id="27" name="Shape 25"/>
-          <p:cNvSpPr/>
-          <p:nvPr/>
-        </p:nvSpPr>
+            <a:ext cx="310896" cy="310896"/>
+          </a:xfrm>
+          <a:prstGeom prst="rect">
+            <a:avLst/>
+          </a:prstGeom>
+        </p:spPr>
+      </p:pic>
+      <p:pic>
+        <p:nvPicPr>
+          <p:cNvPr id="27" name="Image 12" descr="preencoded.png">    </p:cNvPr>
+          <p:cNvPicPr>
+            <a:picLocks noChangeAspect="1"/>
+          </p:cNvPicPr>
+          <p:nvPr/>
+        </p:nvPicPr>
+        <p:blipFill>
+          <a:blip r:embed="rId13"/>
+          <a:stretch>
+            <a:fillRect/>
+          </a:stretch>
+        </p:blipFill>
         <p:spPr>
           <a:xfrm>
             <a:off x="6967728" y="3785616"/>
-            <a:ext cx="292608" cy="292608"/>
-          </a:xfrm>
-          <a:prstGeom prst="ellipse">
-            <a:avLst/>
-          </a:prstGeom>
-          <a:solidFill>
-            <a:srgbClr val="FFD98A"/>
-          </a:solidFill>
-          <a:ln/>
-        </p:spPr>
-      </p:sp>
-      <p:sp>
-        <p:nvSpPr>
-          <p:cNvPr id="28" name="Shape 26"/>
-          <p:cNvSpPr/>
-          <p:nvPr/>
-        </p:nvSpPr>
+            <a:ext cx="310896" cy="310896"/>
+          </a:xfrm>
+          <a:prstGeom prst="rect">
+            <a:avLst/>
+          </a:prstGeom>
+        </p:spPr>
+      </p:pic>
+      <p:pic>
+        <p:nvPicPr>
+          <p:cNvPr id="28" name="Image 13" descr="preencoded.png">    </p:cNvPr>
+          <p:cNvPicPr>
+            <a:picLocks noChangeAspect="1"/>
+          </p:cNvPicPr>
+          <p:nvPr/>
+        </p:nvPicPr>
+        <p:blipFill>
+          <a:blip r:embed="rId14"/>
+          <a:stretch>
+            <a:fillRect/>
+          </a:stretch>
+        </p:blipFill>
         <p:spPr>
           <a:xfrm>
             <a:off x="7351776" y="3785616"/>
-            <a:ext cx="292608" cy="292608"/>
-          </a:xfrm>
-          <a:prstGeom prst="ellipse">
-            <a:avLst/>
-          </a:prstGeom>
-          <a:solidFill>
-            <a:srgbClr val="FFCF4A"/>
-          </a:solidFill>
-          <a:ln/>
-        </p:spPr>
-      </p:sp>
-      <p:sp>
-        <p:nvSpPr>
-          <p:cNvPr id="29" name="Shape 27"/>
-          <p:cNvSpPr/>
-          <p:nvPr/>
-        </p:nvSpPr>
+            <a:ext cx="310896" cy="310896"/>
+          </a:xfrm>
+          <a:prstGeom prst="rect">
+            <a:avLst/>
+          </a:prstGeom>
+        </p:spPr>
+      </p:pic>
+      <p:pic>
+        <p:nvPicPr>
+          <p:cNvPr id="29" name="Image 14" descr="preencoded.png">    </p:cNvPr>
+          <p:cNvPicPr>
+            <a:picLocks noChangeAspect="1"/>
+          </p:cNvPicPr>
+          <p:nvPr/>
+        </p:nvPicPr>
+        <p:blipFill>
+          <a:blip r:embed="rId15"/>
+          <a:stretch>
+            <a:fillRect/>
+          </a:stretch>
+        </p:blipFill>
         <p:spPr>
           <a:xfrm>
             <a:off x="7735824" y="3785616"/>
-            <a:ext cx="292608" cy="292608"/>
-          </a:xfrm>
-          <a:prstGeom prst="ellipse">
-            <a:avLst/>
-          </a:prstGeom>
-          <a:solidFill>
-            <a:srgbClr val="8B7FD9"/>
-          </a:solidFill>
-          <a:ln/>
-        </p:spPr>
-      </p:sp>
-      <p:sp>
-        <p:nvSpPr>
-          <p:cNvPr id="30" name="Shape 28"/>
-          <p:cNvSpPr/>
-          <p:nvPr/>
-        </p:nvSpPr>
+            <a:ext cx="310896" cy="310896"/>
+          </a:xfrm>
+          <a:prstGeom prst="rect">
+            <a:avLst/>
+          </a:prstGeom>
+        </p:spPr>
+      </p:pic>
+      <p:pic>
+        <p:nvPicPr>
+          <p:cNvPr id="30" name="Image 15" descr="preencoded.png">    </p:cNvPr>
+          <p:cNvPicPr>
+            <a:picLocks noChangeAspect="1"/>
+          </p:cNvPicPr>
+          <p:nvPr/>
+        </p:nvPicPr>
+        <p:blipFill>
+          <a:blip r:embed="rId16"/>
+          <a:stretch>
+            <a:fillRect/>
+          </a:stretch>
+        </p:blipFill>
         <p:spPr>
           <a:xfrm>
             <a:off x="8119872" y="3785616"/>
-            <a:ext cx="292608" cy="292608"/>
-          </a:xfrm>
-          <a:prstGeom prst="ellipse">
-            <a:avLst/>
-          </a:prstGeom>
-          <a:solidFill>
-            <a:srgbClr val="7FA8D9"/>
-          </a:solidFill>
-          <a:ln/>
-        </p:spPr>
-      </p:sp>
-      <p:sp>
-        <p:nvSpPr>
-          <p:cNvPr id="31" name="Shape 29"/>
-          <p:cNvSpPr/>
-          <p:nvPr/>
-        </p:nvSpPr>
+            <a:ext cx="310896" cy="310896"/>
+          </a:xfrm>
+          <a:prstGeom prst="rect">
+            <a:avLst/>
+          </a:prstGeom>
+        </p:spPr>
+      </p:pic>
+      <p:pic>
+        <p:nvPicPr>
+          <p:cNvPr id="31" name="Image 16" descr="preencoded.png">    </p:cNvPr>
+          <p:cNvPicPr>
+            <a:picLocks noChangeAspect="1"/>
+          </p:cNvPicPr>
+          <p:nvPr/>
+        </p:nvPicPr>
+        <p:blipFill>
+          <a:blip r:embed="rId17"/>
+          <a:stretch>
+            <a:fillRect/>
+          </a:stretch>
+        </p:blipFill>
         <p:spPr>
           <a:xfrm>
             <a:off x="8503920" y="3785616"/>
-            <a:ext cx="292608" cy="292608"/>
-          </a:xfrm>
-          <a:prstGeom prst="ellipse">
-            <a:avLst/>
-          </a:prstGeom>
-          <a:solidFill>
-            <a:srgbClr val="FFCF4A"/>
-          </a:solidFill>
-          <a:ln/>
-        </p:spPr>
-      </p:sp>
-      <p:sp>
-        <p:nvSpPr>
-          <p:cNvPr id="32" name="Text 30"/>
+            <a:ext cx="310896" cy="310896"/>
+          </a:xfrm>
+          <a:prstGeom prst="rect">
+            <a:avLst/>
+          </a:prstGeom>
+        </p:spPr>
+      </p:pic>
+      <p:sp>
+        <p:nvSpPr>
+          <p:cNvPr id="32" name="Text 13"/>
           <p:cNvSpPr/>
           <p:nvPr/>
         </p:nvSpPr>
@@ -5962,7 +6035,7 @@
       </p:sp>
       <p:sp>
         <p:nvSpPr>
-          <p:cNvPr id="33" name="Text 31"/>
+          <p:cNvPr id="33" name="Text 14"/>
           <p:cNvSpPr/>
           <p:nvPr/>
         </p:nvSpPr>
@@ -9384,7 +9457,7 @@
                 <a:ea typeface="Cambria" pitchFamily="34" charset="-122"/>
                 <a:cs typeface="Cambria" pitchFamily="34" charset="-120"/>
               </a:rPr>
-              <a:t>A cloudy day is not a signal</a:t>
+              <a:t>An “okay” day is not a signal</a:t>
             </a:r>
             <a:endParaRPr lang="en-US" sz="3800" dirty="0"/>
           </a:p>
@@ -9496,115 +9569,135 @@
                 <a:ea typeface="Cambria" pitchFamily="34" charset="-122"/>
                 <a:cs typeface="Cambria" pitchFamily="34" charset="-120"/>
               </a:rPr>
-              <a:t>Ana checks in “cloudy” most days</a:t>
+              <a:t>Ana checks in “okay” most days</a:t>
             </a:r>
             <a:endParaRPr lang="en-US" sz="1900" dirty="0"/>
           </a:p>
         </p:txBody>
       </p:sp>
-      <p:sp>
-        <p:nvSpPr>
-          <p:cNvPr id="6" name="Shape 4"/>
-          <p:cNvSpPr/>
-          <p:nvPr/>
-        </p:nvSpPr>
+      <p:pic>
+        <p:nvPicPr>
+          <p:cNvPr id="6" name="Image 0" descr="preencoded.png">    </p:cNvPr>
+          <p:cNvPicPr>
+            <a:picLocks noChangeAspect="1"/>
+          </p:cNvPicPr>
+          <p:nvPr/>
+        </p:nvPicPr>
+        <p:blipFill>
+          <a:blip r:embed="rId1"/>
+          <a:stretch>
+            <a:fillRect/>
+          </a:stretch>
+        </p:blipFill>
         <p:spPr>
           <a:xfrm>
             <a:off x="1051560" y="2926080"/>
-            <a:ext cx="475488" cy="475488"/>
-          </a:xfrm>
-          <a:prstGeom prst="ellipse">
-            <a:avLst/>
-          </a:prstGeom>
-          <a:solidFill>
-            <a:srgbClr val="B9C4D4"/>
-          </a:solidFill>
-          <a:ln/>
-        </p:spPr>
-      </p:sp>
-      <p:sp>
-        <p:nvSpPr>
-          <p:cNvPr id="7" name="Shape 5"/>
-          <p:cNvSpPr/>
-          <p:nvPr/>
-        </p:nvSpPr>
+            <a:ext cx="512064" cy="512064"/>
+          </a:xfrm>
+          <a:prstGeom prst="rect">
+            <a:avLst/>
+          </a:prstGeom>
+        </p:spPr>
+      </p:pic>
+      <p:pic>
+        <p:nvPicPr>
+          <p:cNvPr id="7" name="Image 1" descr="preencoded.png">    </p:cNvPr>
+          <p:cNvPicPr>
+            <a:picLocks noChangeAspect="1"/>
+          </p:cNvPicPr>
+          <p:nvPr/>
+        </p:nvPicPr>
+        <p:blipFill>
+          <a:blip r:embed="rId2"/>
+          <a:stretch>
+            <a:fillRect/>
+          </a:stretch>
+        </p:blipFill>
         <p:spPr>
           <a:xfrm>
             <a:off x="1709928" y="2926080"/>
-            <a:ext cx="475488" cy="475488"/>
-          </a:xfrm>
-          <a:prstGeom prst="ellipse">
-            <a:avLst/>
-          </a:prstGeom>
-          <a:solidFill>
-            <a:srgbClr val="B9C4D4"/>
-          </a:solidFill>
-          <a:ln/>
-        </p:spPr>
-      </p:sp>
-      <p:sp>
-        <p:nvSpPr>
-          <p:cNvPr id="8" name="Shape 6"/>
-          <p:cNvSpPr/>
-          <p:nvPr/>
-        </p:nvSpPr>
+            <a:ext cx="512064" cy="512064"/>
+          </a:xfrm>
+          <a:prstGeom prst="rect">
+            <a:avLst/>
+          </a:prstGeom>
+        </p:spPr>
+      </p:pic>
+      <p:pic>
+        <p:nvPicPr>
+          <p:cNvPr id="8" name="Image 2" descr="preencoded.png">    </p:cNvPr>
+          <p:cNvPicPr>
+            <a:picLocks noChangeAspect="1"/>
+          </p:cNvPicPr>
+          <p:nvPr/>
+        </p:nvPicPr>
+        <p:blipFill>
+          <a:blip r:embed="rId3"/>
+          <a:stretch>
+            <a:fillRect/>
+          </a:stretch>
+        </p:blipFill>
         <p:spPr>
           <a:xfrm>
             <a:off x="2368296" y="2926080"/>
-            <a:ext cx="475488" cy="475488"/>
-          </a:xfrm>
-          <a:prstGeom prst="ellipse">
-            <a:avLst/>
-          </a:prstGeom>
-          <a:solidFill>
-            <a:srgbClr val="7FA8D9"/>
-          </a:solidFill>
-          <a:ln/>
-        </p:spPr>
-      </p:sp>
-      <p:sp>
-        <p:nvSpPr>
-          <p:cNvPr id="9" name="Shape 7"/>
-          <p:cNvSpPr/>
-          <p:nvPr/>
-        </p:nvSpPr>
+            <a:ext cx="512064" cy="512064"/>
+          </a:xfrm>
+          <a:prstGeom prst="rect">
+            <a:avLst/>
+          </a:prstGeom>
+        </p:spPr>
+      </p:pic>
+      <p:pic>
+        <p:nvPicPr>
+          <p:cNvPr id="9" name="Image 3" descr="preencoded.png">    </p:cNvPr>
+          <p:cNvPicPr>
+            <a:picLocks noChangeAspect="1"/>
+          </p:cNvPicPr>
+          <p:nvPr/>
+        </p:nvPicPr>
+        <p:blipFill>
+          <a:blip r:embed="rId4"/>
+          <a:stretch>
+            <a:fillRect/>
+          </a:stretch>
+        </p:blipFill>
         <p:spPr>
           <a:xfrm>
             <a:off x="3026664" y="2926080"/>
-            <a:ext cx="475488" cy="475488"/>
-          </a:xfrm>
-          <a:prstGeom prst="ellipse">
-            <a:avLst/>
-          </a:prstGeom>
-          <a:solidFill>
-            <a:srgbClr val="B9C4D4"/>
-          </a:solidFill>
-          <a:ln/>
-        </p:spPr>
-      </p:sp>
-      <p:sp>
-        <p:nvSpPr>
-          <p:cNvPr id="10" name="Shape 8"/>
-          <p:cNvSpPr/>
-          <p:nvPr/>
-        </p:nvSpPr>
+            <a:ext cx="512064" cy="512064"/>
+          </a:xfrm>
+          <a:prstGeom prst="rect">
+            <a:avLst/>
+          </a:prstGeom>
+        </p:spPr>
+      </p:pic>
+      <p:pic>
+        <p:nvPicPr>
+          <p:cNvPr id="10" name="Image 4" descr="preencoded.png">    </p:cNvPr>
+          <p:cNvPicPr>
+            <a:picLocks noChangeAspect="1"/>
+          </p:cNvPicPr>
+          <p:nvPr/>
+        </p:nvPicPr>
+        <p:blipFill>
+          <a:blip r:embed="rId5"/>
+          <a:stretch>
+            <a:fillRect/>
+          </a:stretch>
+        </p:blipFill>
         <p:spPr>
           <a:xfrm>
             <a:off x="3685032" y="2926080"/>
-            <a:ext cx="475488" cy="475488"/>
-          </a:xfrm>
-          <a:prstGeom prst="ellipse">
-            <a:avLst/>
-          </a:prstGeom>
-          <a:solidFill>
-            <a:srgbClr val="B9C4D4"/>
-          </a:solidFill>
-          <a:ln/>
-        </p:spPr>
-      </p:sp>
-      <p:sp>
-        <p:nvSpPr>
-          <p:cNvPr id="11" name="Text 9"/>
+            <a:ext cx="512064" cy="512064"/>
+          </a:xfrm>
+          <a:prstGeom prst="rect">
+            <a:avLst/>
+          </a:prstGeom>
+        </p:spPr>
+      </p:pic>
+      <p:sp>
+        <p:nvSpPr>
+          <p:cNvPr id="11" name="Text 4"/>
           <p:cNvSpPr/>
           <p:nvPr/>
         </p:nvSpPr>
@@ -9643,7 +9736,7 @@
       </p:sp>
       <p:sp>
         <p:nvSpPr>
-          <p:cNvPr id="12" name="Text 10"/>
+          <p:cNvPr id="12" name="Text 5"/>
           <p:cNvSpPr/>
           <p:nvPr/>
         </p:nvSpPr>
@@ -9685,7 +9778,7 @@
       </p:sp>
       <p:sp>
         <p:nvSpPr>
-          <p:cNvPr id="13" name="Shape 11"/>
+          <p:cNvPr id="13" name="Shape 6"/>
           <p:cNvSpPr/>
           <p:nvPr/>
         </p:nvSpPr>
@@ -9719,7 +9812,7 @@
       </p:sp>
       <p:sp>
         <p:nvSpPr>
-          <p:cNvPr id="14" name="Text 12"/>
+          <p:cNvPr id="14" name="Text 7"/>
           <p:cNvSpPr/>
           <p:nvPr/>
         </p:nvSpPr>
@@ -9750,115 +9843,135 @@
                 <a:ea typeface="Cambria" pitchFamily="34" charset="-122"/>
                 <a:cs typeface="Cambria" pitchFamily="34" charset="-120"/>
               </a:rPr>
-              <a:t>Ben checks in “sunny” most days</a:t>
+              <a:t>Ben checks in “great” most days</a:t>
             </a:r>
             <a:endParaRPr lang="en-US" sz="1900" dirty="0"/>
           </a:p>
         </p:txBody>
       </p:sp>
-      <p:sp>
-        <p:nvSpPr>
-          <p:cNvPr id="15" name="Shape 13"/>
-          <p:cNvSpPr/>
-          <p:nvPr/>
-        </p:nvSpPr>
+      <p:pic>
+        <p:nvPicPr>
+          <p:cNvPr id="15" name="Image 5" descr="preencoded.png">    </p:cNvPr>
+          <p:cNvPicPr>
+            <a:picLocks noChangeAspect="1"/>
+          </p:cNvPicPr>
+          <p:nvPr/>
+        </p:nvPicPr>
+        <p:blipFill>
+          <a:blip r:embed="rId6"/>
+          <a:stretch>
+            <a:fillRect/>
+          </a:stretch>
+        </p:blipFill>
         <p:spPr>
           <a:xfrm>
             <a:off x="6583680" y="2926080"/>
-            <a:ext cx="475488" cy="475488"/>
-          </a:xfrm>
-          <a:prstGeom prst="ellipse">
-            <a:avLst/>
-          </a:prstGeom>
-          <a:solidFill>
-            <a:srgbClr val="FFCF4A"/>
-          </a:solidFill>
-          <a:ln/>
-        </p:spPr>
-      </p:sp>
-      <p:sp>
-        <p:nvSpPr>
-          <p:cNvPr id="16" name="Shape 14"/>
-          <p:cNvSpPr/>
-          <p:nvPr/>
-        </p:nvSpPr>
+            <a:ext cx="512064" cy="512064"/>
+          </a:xfrm>
+          <a:prstGeom prst="rect">
+            <a:avLst/>
+          </a:prstGeom>
+        </p:spPr>
+      </p:pic>
+      <p:pic>
+        <p:nvPicPr>
+          <p:cNvPr id="16" name="Image 6" descr="preencoded.png">    </p:cNvPr>
+          <p:cNvPicPr>
+            <a:picLocks noChangeAspect="1"/>
+          </p:cNvPicPr>
+          <p:nvPr/>
+        </p:nvPicPr>
+        <p:blipFill>
+          <a:blip r:embed="rId7"/>
+          <a:stretch>
+            <a:fillRect/>
+          </a:stretch>
+        </p:blipFill>
         <p:spPr>
           <a:xfrm>
             <a:off x="7242048" y="2926080"/>
-            <a:ext cx="475488" cy="475488"/>
-          </a:xfrm>
-          <a:prstGeom prst="ellipse">
-            <a:avLst/>
-          </a:prstGeom>
-          <a:solidFill>
-            <a:srgbClr val="FFCF4A"/>
-          </a:solidFill>
-          <a:ln/>
-        </p:spPr>
-      </p:sp>
-      <p:sp>
-        <p:nvSpPr>
-          <p:cNvPr id="17" name="Shape 15"/>
-          <p:cNvSpPr/>
-          <p:nvPr/>
-        </p:nvSpPr>
+            <a:ext cx="512064" cy="512064"/>
+          </a:xfrm>
+          <a:prstGeom prst="rect">
+            <a:avLst/>
+          </a:prstGeom>
+        </p:spPr>
+      </p:pic>
+      <p:pic>
+        <p:nvPicPr>
+          <p:cNvPr id="17" name="Image 7" descr="preencoded.png">    </p:cNvPr>
+          <p:cNvPicPr>
+            <a:picLocks noChangeAspect="1"/>
+          </p:cNvPicPr>
+          <p:nvPr/>
+        </p:nvPicPr>
+        <p:blipFill>
+          <a:blip r:embed="rId8"/>
+          <a:stretch>
+            <a:fillRect/>
+          </a:stretch>
+        </p:blipFill>
         <p:spPr>
           <a:xfrm>
             <a:off x="7900416" y="2926080"/>
-            <a:ext cx="475488" cy="475488"/>
-          </a:xfrm>
-          <a:prstGeom prst="ellipse">
-            <a:avLst/>
-          </a:prstGeom>
-          <a:solidFill>
-            <a:srgbClr val="FFCF4A"/>
-          </a:solidFill>
-          <a:ln/>
-        </p:spPr>
-      </p:sp>
-      <p:sp>
-        <p:nvSpPr>
-          <p:cNvPr id="18" name="Shape 16"/>
-          <p:cNvSpPr/>
-          <p:nvPr/>
-        </p:nvSpPr>
+            <a:ext cx="512064" cy="512064"/>
+          </a:xfrm>
+          <a:prstGeom prst="rect">
+            <a:avLst/>
+          </a:prstGeom>
+        </p:spPr>
+      </p:pic>
+      <p:pic>
+        <p:nvPicPr>
+          <p:cNvPr id="18" name="Image 8" descr="preencoded.png">    </p:cNvPr>
+          <p:cNvPicPr>
+            <a:picLocks noChangeAspect="1"/>
+          </p:cNvPicPr>
+          <p:nvPr/>
+        </p:nvPicPr>
+        <p:blipFill>
+          <a:blip r:embed="rId9"/>
+          <a:stretch>
+            <a:fillRect/>
+          </a:stretch>
+        </p:blipFill>
         <p:spPr>
           <a:xfrm>
             <a:off x="8558784" y="2926080"/>
-            <a:ext cx="475488" cy="475488"/>
-          </a:xfrm>
-          <a:prstGeom prst="ellipse">
-            <a:avLst/>
-          </a:prstGeom>
-          <a:solidFill>
-            <a:srgbClr val="7FA8D9"/>
-          </a:solidFill>
-          <a:ln/>
-        </p:spPr>
-      </p:sp>
-      <p:sp>
-        <p:nvSpPr>
-          <p:cNvPr id="19" name="Shape 17"/>
-          <p:cNvSpPr/>
-          <p:nvPr/>
-        </p:nvSpPr>
+            <a:ext cx="512064" cy="512064"/>
+          </a:xfrm>
+          <a:prstGeom prst="rect">
+            <a:avLst/>
+          </a:prstGeom>
+        </p:spPr>
+      </p:pic>
+      <p:pic>
+        <p:nvPicPr>
+          <p:cNvPr id="19" name="Image 9" descr="preencoded.png">    </p:cNvPr>
+          <p:cNvPicPr>
+            <a:picLocks noChangeAspect="1"/>
+          </p:cNvPicPr>
+          <p:nvPr/>
+        </p:nvPicPr>
+        <p:blipFill>
+          <a:blip r:embed="rId10"/>
+          <a:stretch>
+            <a:fillRect/>
+          </a:stretch>
+        </p:blipFill>
         <p:spPr>
           <a:xfrm>
             <a:off x="9217152" y="2926080"/>
-            <a:ext cx="475488" cy="475488"/>
-          </a:xfrm>
-          <a:prstGeom prst="ellipse">
-            <a:avLst/>
-          </a:prstGeom>
-          <a:solidFill>
-            <a:srgbClr val="7FA8D9"/>
-          </a:solidFill>
-          <a:ln/>
-        </p:spPr>
-      </p:sp>
-      <p:sp>
-        <p:nvSpPr>
-          <p:cNvPr id="20" name="Text 18"/>
+            <a:ext cx="512064" cy="512064"/>
+          </a:xfrm>
+          <a:prstGeom prst="rect">
+            <a:avLst/>
+          </a:prstGeom>
+        </p:spPr>
+      </p:pic>
+      <p:sp>
+        <p:nvSpPr>
+          <p:cNvPr id="20" name="Text 8"/>
           <p:cNvSpPr/>
           <p:nvPr/>
         </p:nvSpPr>
@@ -9897,7 +10010,7 @@
       </p:sp>
       <p:sp>
         <p:nvSpPr>
-          <p:cNvPr id="21" name="Text 19"/>
+          <p:cNvPr id="21" name="Text 9"/>
           <p:cNvSpPr/>
           <p:nvPr/>
         </p:nvSpPr>
@@ -9931,7 +10044,7 @@
                 <a:ea typeface="Calibri" pitchFamily="34" charset="-122"/>
                 <a:cs typeface="Calibri" pitchFamily="34" charset="-120"/>
               </a:rPr>
-              <a:t>Same two “rainy” days as Ana — but for Ben they are a departure. Change is the signal, not the level.</a:t>
+              <a:t>Same two “not good” days as Ana — but for Ben they are a departure. Change is the signal, not the level.</a:t>
             </a:r>
             <a:endParaRPr lang="en-US" sz="1300" dirty="0"/>
           </a:p>
@@ -9939,7 +10052,7 @@
       </p:sp>
       <p:sp>
         <p:nvSpPr>
-          <p:cNvPr id="22" name="Shape 20"/>
+          <p:cNvPr id="22" name="Shape 10"/>
           <p:cNvSpPr/>
           <p:nvPr/>
         </p:nvSpPr>
@@ -9973,7 +10086,7 @@
       </p:sp>
       <p:sp>
         <p:nvSpPr>
-          <p:cNvPr id="23" name="Text 21"/>
+          <p:cNvPr id="23" name="Text 11"/>
           <p:cNvSpPr/>
           <p:nvPr/>
         </p:nvSpPr>
@@ -10012,7 +10125,7 @@
       </p:sp>
       <p:sp>
         <p:nvSpPr>
-          <p:cNvPr id="24" name="Text 22"/>
+          <p:cNvPr id="24" name="Text 12"/>
           <p:cNvSpPr/>
           <p:nvPr/>
         </p:nvSpPr>
